--- a/report/2026_06_26_competitive_report.pptx
+++ b/report/2026_06_26_competitive_report.pptx
@@ -3090,7 +3090,7 @@
     <p:bg>
       <p:bgPr>
         <a:solidFill>
-          <a:srgbClr val="004628"/>
+          <a:srgbClr val="005BAC"/>
         </a:solidFill>
         <a:effectLst/>
       </p:bgPr>
@@ -3195,7 +3195,7 @@
             <a:pPr>
               <a:defRPr b="1" sz="2800">
                 <a:solidFill>
-                  <a:srgbClr val="004628"/>
+                  <a:srgbClr val="005BAC"/>
                 </a:solidFill>
               </a:defRPr>
             </a:pPr>
@@ -3346,7 +3346,7 @@
             <a:pPr>
               <a:defRPr b="1" sz="2800">
                 <a:solidFill>
-                  <a:srgbClr val="004628"/>
+                  <a:srgbClr val="005BAC"/>
                 </a:solidFill>
               </a:defRPr>
             </a:pPr>
@@ -3403,7 +3403,7 @@
                   </a:txBody>
                   <a:tcPr>
                     <a:solidFill>
-                      <a:srgbClr val="004628"/>
+                      <a:srgbClr val="005BAC"/>
                     </a:solidFill>
                   </a:tcPr>
                 </a:tc>
@@ -3426,7 +3426,7 @@
                   </a:txBody>
                   <a:tcPr>
                     <a:solidFill>
-                      <a:srgbClr val="004628"/>
+                      <a:srgbClr val="005BAC"/>
                     </a:solidFill>
                   </a:tcPr>
                 </a:tc>
@@ -3449,7 +3449,7 @@
                   </a:txBody>
                   <a:tcPr>
                     <a:solidFill>
-                      <a:srgbClr val="004628"/>
+                      <a:srgbClr val="005BAC"/>
                     </a:solidFill>
                   </a:tcPr>
                 </a:tc>
@@ -3472,7 +3472,7 @@
                   </a:txBody>
                   <a:tcPr>
                     <a:solidFill>
-                      <a:srgbClr val="004628"/>
+                      <a:srgbClr val="005BAC"/>
                     </a:solidFill>
                   </a:tcPr>
                 </a:tc>
@@ -3495,7 +3495,7 @@
                   </a:txBody>
                   <a:tcPr>
                     <a:solidFill>
-                      <a:srgbClr val="004628"/>
+                      <a:srgbClr val="005BAC"/>
                     </a:solidFill>
                   </a:tcPr>
                 </a:tc>
@@ -3518,7 +3518,7 @@
                   </a:txBody>
                   <a:tcPr>
                     <a:solidFill>
-                      <a:srgbClr val="004628"/>
+                      <a:srgbClr val="005BAC"/>
                     </a:solidFill>
                   </a:tcPr>
                 </a:tc>
@@ -3541,7 +3541,7 @@
                   </a:txBody>
                   <a:tcPr>
                     <a:solidFill>
-                      <a:srgbClr val="004628"/>
+                      <a:srgbClr val="005BAC"/>
                     </a:solidFill>
                   </a:tcPr>
                 </a:tc>
@@ -4054,7 +4054,7 @@
             <a:pPr>
               <a:defRPr b="1" sz="2800">
                 <a:solidFill>
-                  <a:srgbClr val="004628"/>
+                  <a:srgbClr val="005BAC"/>
                 </a:solidFill>
               </a:defRPr>
             </a:pPr>
@@ -4190,7 +4190,7 @@
             <a:pPr>
               <a:defRPr b="1" sz="2800">
                 <a:solidFill>
-                  <a:srgbClr val="004628"/>
+                  <a:srgbClr val="005BAC"/>
                 </a:solidFill>
               </a:defRPr>
             </a:pPr>
@@ -4311,7 +4311,7 @@
             <a:pPr>
               <a:defRPr b="1" sz="2800">
                 <a:solidFill>
-                  <a:srgbClr val="004628"/>
+                  <a:srgbClr val="005BAC"/>
                 </a:solidFill>
               </a:defRPr>
             </a:pPr>
@@ -4483,7 +4483,7 @@
             <a:pPr>
               <a:defRPr b="1" sz="2800">
                 <a:solidFill>
-                  <a:srgbClr val="004628"/>
+                  <a:srgbClr val="005BAC"/>
                 </a:solidFill>
               </a:defRPr>
             </a:pPr>
